--- a/lectures/week-06/lecture-en.pptx
+++ b/lectures/week-06/lecture-en.pptx
@@ -16635,7 +16635,7 @@
                 </a:solidFill>
                 <a:latin typeface="Source Han Sans SC"/>
               </a:rPr>
-              <a:t>Theory ~90 min · Lab ~75 min · Quiz &amp; Summary 15 min</a:t>
+              <a:t>Theory ~90 min · Lab 80 min · Quiz &amp; Summary 10 min</a:t>
             </a:r>
           </a:p>
         </p:txBody>

--- a/lectures/week-06/lecture-en.pptx
+++ b/lectures/week-06/lecture-en.pptx
@@ -6336,7 +6336,7 @@
         <p:spPr>
           <a:xfrm>
             <a:off x="1987199" y="1584000"/>
-            <a:ext cx="1173600" cy="475200"/>
+            <a:ext cx="1000079" cy="475200"/>
           </a:xfrm>
           <a:prstGeom prst="rect">
             <a:avLst/>
@@ -6380,7 +6380,7 @@
         <p:spPr>
           <a:xfrm>
             <a:off x="1987199" y="1713600"/>
-            <a:ext cx="1173600" cy="216000"/>
+            <a:ext cx="1000079" cy="216000"/>
           </a:xfrm>
           <a:prstGeom prst="rect">
             <a:avLst/>
@@ -6418,8 +6418,8 @@
         </p:nvSpPr>
         <p:spPr>
           <a:xfrm>
-            <a:off x="3211200" y="1584000"/>
-            <a:ext cx="1173600" cy="475200"/>
+            <a:off x="3037679" y="1584000"/>
+            <a:ext cx="1000079" cy="475200"/>
           </a:xfrm>
           <a:prstGeom prst="rect">
             <a:avLst/>
@@ -6462,8 +6462,8 @@
         </p:nvSpPr>
         <p:spPr>
           <a:xfrm>
-            <a:off x="3211200" y="1713600"/>
-            <a:ext cx="1173600" cy="216000"/>
+            <a:off x="3037679" y="1713600"/>
+            <a:ext cx="1000079" cy="216000"/>
           </a:xfrm>
           <a:prstGeom prst="rect">
             <a:avLst/>
@@ -6501,8 +6501,8 @@
         </p:nvSpPr>
         <p:spPr>
           <a:xfrm>
-            <a:off x="4435200" y="1584000"/>
-            <a:ext cx="1173600" cy="475200"/>
+            <a:off x="4088159" y="1584000"/>
+            <a:ext cx="1000079" cy="475200"/>
           </a:xfrm>
           <a:prstGeom prst="rect">
             <a:avLst/>
@@ -6545,8 +6545,8 @@
         </p:nvSpPr>
         <p:spPr>
           <a:xfrm>
-            <a:off x="4435200" y="1713600"/>
-            <a:ext cx="1173600" cy="216000"/>
+            <a:off x="4088159" y="1713600"/>
+            <a:ext cx="1000079" cy="216000"/>
           </a:xfrm>
           <a:prstGeom prst="rect">
             <a:avLst/>
@@ -6584,8 +6584,8 @@
         </p:nvSpPr>
         <p:spPr>
           <a:xfrm>
-            <a:off x="5659200" y="1584000"/>
-            <a:ext cx="1173600" cy="475200"/>
+            <a:off x="5138640" y="1584000"/>
+            <a:ext cx="1000079" cy="475200"/>
           </a:xfrm>
           <a:prstGeom prst="rect">
             <a:avLst/>
@@ -6628,8 +6628,8 @@
         </p:nvSpPr>
         <p:spPr>
           <a:xfrm>
-            <a:off x="5659200" y="1713600"/>
-            <a:ext cx="1173600" cy="216000"/>
+            <a:off x="5138640" y="1713600"/>
+            <a:ext cx="1000079" cy="216000"/>
           </a:xfrm>
           <a:prstGeom prst="rect">
             <a:avLst/>
@@ -6667,8 +6667,8 @@
         </p:nvSpPr>
         <p:spPr>
           <a:xfrm>
-            <a:off x="6883199" y="1584000"/>
-            <a:ext cx="1173600" cy="475200"/>
+            <a:off x="6189120" y="1584000"/>
+            <a:ext cx="1000079" cy="475200"/>
           </a:xfrm>
           <a:prstGeom prst="rect">
             <a:avLst/>
@@ -6711,8 +6711,8 @@
         </p:nvSpPr>
         <p:spPr>
           <a:xfrm>
-            <a:off x="6883199" y="1713600"/>
-            <a:ext cx="1173600" cy="216000"/>
+            <a:off x="6189120" y="1713600"/>
+            <a:ext cx="1000079" cy="216000"/>
           </a:xfrm>
           <a:prstGeom prst="rect">
             <a:avLst/>
@@ -6790,7 +6790,7 @@
         <p:spPr>
           <a:xfrm>
             <a:off x="1987199" y="2210400"/>
-            <a:ext cx="1173600" cy="475200"/>
+            <a:ext cx="1000079" cy="475200"/>
           </a:xfrm>
           <a:prstGeom prst="rect">
             <a:avLst/>
@@ -6834,7 +6834,7 @@
         <p:spPr>
           <a:xfrm>
             <a:off x="1987199" y="2340000"/>
-            <a:ext cx="1173600" cy="216000"/>
+            <a:ext cx="1000079" cy="216000"/>
           </a:xfrm>
           <a:prstGeom prst="rect">
             <a:avLst/>
@@ -6872,8 +6872,8 @@
         </p:nvSpPr>
         <p:spPr>
           <a:xfrm>
-            <a:off x="3211200" y="2210400"/>
-            <a:ext cx="1173600" cy="475200"/>
+            <a:off x="3037679" y="2210400"/>
+            <a:ext cx="1000079" cy="475200"/>
           </a:xfrm>
           <a:prstGeom prst="rect">
             <a:avLst/>
@@ -6916,8 +6916,8 @@
         </p:nvSpPr>
         <p:spPr>
           <a:xfrm>
-            <a:off x="3211200" y="2340000"/>
-            <a:ext cx="1173600" cy="216000"/>
+            <a:off x="3037679" y="2340000"/>
+            <a:ext cx="1000079" cy="216000"/>
           </a:xfrm>
           <a:prstGeom prst="rect">
             <a:avLst/>
@@ -6955,8 +6955,8 @@
         </p:nvSpPr>
         <p:spPr>
           <a:xfrm>
-            <a:off x="4435200" y="2210400"/>
-            <a:ext cx="1173600" cy="475200"/>
+            <a:off x="4088159" y="2210400"/>
+            <a:ext cx="1000079" cy="475200"/>
           </a:xfrm>
           <a:prstGeom prst="rect">
             <a:avLst/>
@@ -6999,8 +6999,8 @@
         </p:nvSpPr>
         <p:spPr>
           <a:xfrm>
-            <a:off x="4435200" y="2340000"/>
-            <a:ext cx="1173600" cy="216000"/>
+            <a:off x="4088159" y="2340000"/>
+            <a:ext cx="1000079" cy="216000"/>
           </a:xfrm>
           <a:prstGeom prst="rect">
             <a:avLst/>
@@ -7038,8 +7038,8 @@
         </p:nvSpPr>
         <p:spPr>
           <a:xfrm>
-            <a:off x="5659200" y="2210400"/>
-            <a:ext cx="1173600" cy="475200"/>
+            <a:off x="5138640" y="2210400"/>
+            <a:ext cx="1000079" cy="475200"/>
           </a:xfrm>
           <a:prstGeom prst="rect">
             <a:avLst/>
@@ -7082,8 +7082,8 @@
         </p:nvSpPr>
         <p:spPr>
           <a:xfrm>
-            <a:off x="5659200" y="2340000"/>
-            <a:ext cx="1173600" cy="216000"/>
+            <a:off x="5138640" y="2340000"/>
+            <a:ext cx="1000079" cy="216000"/>
           </a:xfrm>
           <a:prstGeom prst="rect">
             <a:avLst/>
@@ -7121,8 +7121,8 @@
         </p:nvSpPr>
         <p:spPr>
           <a:xfrm>
-            <a:off x="6883199" y="2210400"/>
-            <a:ext cx="1173600" cy="475200"/>
+            <a:off x="6189120" y="2210400"/>
+            <a:ext cx="1000079" cy="475200"/>
           </a:xfrm>
           <a:prstGeom prst="rect">
             <a:avLst/>
@@ -7165,8 +7165,8 @@
         </p:nvSpPr>
         <p:spPr>
           <a:xfrm>
-            <a:off x="6883199" y="2340000"/>
-            <a:ext cx="1173600" cy="216000"/>
+            <a:off x="6189120" y="2340000"/>
+            <a:ext cx="1000079" cy="216000"/>
           </a:xfrm>
           <a:prstGeom prst="rect">
             <a:avLst/>
@@ -7244,7 +7244,7 @@
         <p:spPr>
           <a:xfrm>
             <a:off x="1987199" y="2836800"/>
-            <a:ext cx="1173600" cy="475200"/>
+            <a:ext cx="1000079" cy="475200"/>
           </a:xfrm>
           <a:prstGeom prst="rect">
             <a:avLst/>
@@ -7288,7 +7288,7 @@
         <p:spPr>
           <a:xfrm>
             <a:off x="1987199" y="2966400"/>
-            <a:ext cx="1173600" cy="216000"/>
+            <a:ext cx="1000079" cy="216000"/>
           </a:xfrm>
           <a:prstGeom prst="rect">
             <a:avLst/>
@@ -7326,8 +7326,8 @@
         </p:nvSpPr>
         <p:spPr>
           <a:xfrm>
-            <a:off x="3211200" y="2836800"/>
-            <a:ext cx="1173600" cy="475200"/>
+            <a:off x="3037679" y="2836800"/>
+            <a:ext cx="1000079" cy="475200"/>
           </a:xfrm>
           <a:prstGeom prst="rect">
             <a:avLst/>
@@ -7370,8 +7370,8 @@
         </p:nvSpPr>
         <p:spPr>
           <a:xfrm>
-            <a:off x="3211200" y="2966400"/>
-            <a:ext cx="1173600" cy="216000"/>
+            <a:off x="3037679" y="2966400"/>
+            <a:ext cx="1000079" cy="216000"/>
           </a:xfrm>
           <a:prstGeom prst="rect">
             <a:avLst/>
@@ -7409,8 +7409,8 @@
         </p:nvSpPr>
         <p:spPr>
           <a:xfrm>
-            <a:off x="4435200" y="2836800"/>
-            <a:ext cx="1173600" cy="475200"/>
+            <a:off x="4088159" y="2836800"/>
+            <a:ext cx="1000079" cy="475200"/>
           </a:xfrm>
           <a:prstGeom prst="rect">
             <a:avLst/>
@@ -7453,8 +7453,8 @@
         </p:nvSpPr>
         <p:spPr>
           <a:xfrm>
-            <a:off x="4435200" y="2966400"/>
-            <a:ext cx="1173600" cy="216000"/>
+            <a:off x="4088159" y="2966400"/>
+            <a:ext cx="1000079" cy="216000"/>
           </a:xfrm>
           <a:prstGeom prst="rect">
             <a:avLst/>
@@ -7492,8 +7492,8 @@
         </p:nvSpPr>
         <p:spPr>
           <a:xfrm>
-            <a:off x="5659200" y="2836800"/>
-            <a:ext cx="1173600" cy="475200"/>
+            <a:off x="5138640" y="2836800"/>
+            <a:ext cx="1000079" cy="475200"/>
           </a:xfrm>
           <a:prstGeom prst="rect">
             <a:avLst/>
@@ -7536,8 +7536,8 @@
         </p:nvSpPr>
         <p:spPr>
           <a:xfrm>
-            <a:off x="5659200" y="2966400"/>
-            <a:ext cx="1173600" cy="216000"/>
+            <a:off x="5138640" y="2966400"/>
+            <a:ext cx="1000079" cy="216000"/>
           </a:xfrm>
           <a:prstGeom prst="rect">
             <a:avLst/>
@@ -7575,8 +7575,8 @@
         </p:nvSpPr>
         <p:spPr>
           <a:xfrm>
-            <a:off x="6883199" y="2836800"/>
-            <a:ext cx="1173600" cy="475200"/>
+            <a:off x="6189120" y="2836800"/>
+            <a:ext cx="1000079" cy="475200"/>
           </a:xfrm>
           <a:prstGeom prst="rect">
             <a:avLst/>
@@ -7619,8 +7619,8 @@
         </p:nvSpPr>
         <p:spPr>
           <a:xfrm>
-            <a:off x="6883199" y="2966400"/>
-            <a:ext cx="1173600" cy="216000"/>
+            <a:off x="6189120" y="2966400"/>
+            <a:ext cx="1000079" cy="216000"/>
           </a:xfrm>
           <a:prstGeom prst="rect">
             <a:avLst/>
@@ -7698,7 +7698,7 @@
         <p:spPr>
           <a:xfrm>
             <a:off x="1987199" y="3463200"/>
-            <a:ext cx="1173600" cy="475200"/>
+            <a:ext cx="1000079" cy="475200"/>
           </a:xfrm>
           <a:prstGeom prst="rect">
             <a:avLst/>
@@ -7742,7 +7742,7 @@
         <p:spPr>
           <a:xfrm>
             <a:off x="1987199" y="3592800"/>
-            <a:ext cx="1173600" cy="216000"/>
+            <a:ext cx="1000079" cy="216000"/>
           </a:xfrm>
           <a:prstGeom prst="rect">
             <a:avLst/>
@@ -7780,8 +7780,8 @@
         </p:nvSpPr>
         <p:spPr>
           <a:xfrm>
-            <a:off x="3211200" y="3463200"/>
-            <a:ext cx="1173600" cy="475200"/>
+            <a:off x="3037679" y="3463200"/>
+            <a:ext cx="1000079" cy="475200"/>
           </a:xfrm>
           <a:prstGeom prst="rect">
             <a:avLst/>
@@ -7824,8 +7824,8 @@
         </p:nvSpPr>
         <p:spPr>
           <a:xfrm>
-            <a:off x="3211200" y="3592800"/>
-            <a:ext cx="1173600" cy="216000"/>
+            <a:off x="3037679" y="3592800"/>
+            <a:ext cx="1000079" cy="216000"/>
           </a:xfrm>
           <a:prstGeom prst="rect">
             <a:avLst/>
@@ -7863,8 +7863,8 @@
         </p:nvSpPr>
         <p:spPr>
           <a:xfrm>
-            <a:off x="4435200" y="3463200"/>
-            <a:ext cx="1173600" cy="475200"/>
+            <a:off x="4088159" y="3463200"/>
+            <a:ext cx="1000079" cy="475200"/>
           </a:xfrm>
           <a:prstGeom prst="rect">
             <a:avLst/>
@@ -7907,8 +7907,8 @@
         </p:nvSpPr>
         <p:spPr>
           <a:xfrm>
-            <a:off x="4435200" y="3592800"/>
-            <a:ext cx="1173600" cy="216000"/>
+            <a:off x="4088159" y="3592800"/>
+            <a:ext cx="1000079" cy="216000"/>
           </a:xfrm>
           <a:prstGeom prst="rect">
             <a:avLst/>
@@ -7946,8 +7946,8 @@
         </p:nvSpPr>
         <p:spPr>
           <a:xfrm>
-            <a:off x="5659200" y="3463200"/>
-            <a:ext cx="1173600" cy="475200"/>
+            <a:off x="5138640" y="3463200"/>
+            <a:ext cx="1000079" cy="475200"/>
           </a:xfrm>
           <a:prstGeom prst="rect">
             <a:avLst/>
@@ -7990,8 +7990,8 @@
         </p:nvSpPr>
         <p:spPr>
           <a:xfrm>
-            <a:off x="5659200" y="3592800"/>
-            <a:ext cx="1173600" cy="216000"/>
+            <a:off x="5138640" y="3592800"/>
+            <a:ext cx="1000079" cy="216000"/>
           </a:xfrm>
           <a:prstGeom prst="rect">
             <a:avLst/>
@@ -8029,8 +8029,8 @@
         </p:nvSpPr>
         <p:spPr>
           <a:xfrm>
-            <a:off x="6883199" y="3463200"/>
-            <a:ext cx="1173600" cy="475200"/>
+            <a:off x="6189120" y="3463200"/>
+            <a:ext cx="1000079" cy="475200"/>
           </a:xfrm>
           <a:prstGeom prst="rect">
             <a:avLst/>
@@ -8073,8 +8073,8 @@
         </p:nvSpPr>
         <p:spPr>
           <a:xfrm>
-            <a:off x="6883199" y="3592800"/>
-            <a:ext cx="1173600" cy="216000"/>
+            <a:off x="6189120" y="3592800"/>
+            <a:ext cx="1000079" cy="216000"/>
           </a:xfrm>
           <a:prstGeom prst="rect">
             <a:avLst/>
@@ -8152,7 +8152,7 @@
         <p:spPr>
           <a:xfrm>
             <a:off x="1987199" y="4089600"/>
-            <a:ext cx="1173600" cy="475200"/>
+            <a:ext cx="1000079" cy="475200"/>
           </a:xfrm>
           <a:prstGeom prst="rect">
             <a:avLst/>
@@ -8196,7 +8196,7 @@
         <p:spPr>
           <a:xfrm>
             <a:off x="1987199" y="4219200"/>
-            <a:ext cx="1173600" cy="216000"/>
+            <a:ext cx="1000079" cy="216000"/>
           </a:xfrm>
           <a:prstGeom prst="rect">
             <a:avLst/>
@@ -8234,8 +8234,8 @@
         </p:nvSpPr>
         <p:spPr>
           <a:xfrm>
-            <a:off x="3211200" y="4089600"/>
-            <a:ext cx="1173600" cy="475200"/>
+            <a:off x="3037679" y="4089600"/>
+            <a:ext cx="1000079" cy="475200"/>
           </a:xfrm>
           <a:prstGeom prst="rect">
             <a:avLst/>
@@ -8278,8 +8278,8 @@
         </p:nvSpPr>
         <p:spPr>
           <a:xfrm>
-            <a:off x="3211200" y="4219200"/>
-            <a:ext cx="1173600" cy="216000"/>
+            <a:off x="3037679" y="4219200"/>
+            <a:ext cx="1000079" cy="216000"/>
           </a:xfrm>
           <a:prstGeom prst="rect">
             <a:avLst/>
@@ -8317,8 +8317,8 @@
         </p:nvSpPr>
         <p:spPr>
           <a:xfrm>
-            <a:off x="4435200" y="4089600"/>
-            <a:ext cx="1173600" cy="475200"/>
+            <a:off x="4088159" y="4089600"/>
+            <a:ext cx="1000079" cy="475200"/>
           </a:xfrm>
           <a:prstGeom prst="rect">
             <a:avLst/>
@@ -8361,8 +8361,8 @@
         </p:nvSpPr>
         <p:spPr>
           <a:xfrm>
-            <a:off x="4435200" y="4219200"/>
-            <a:ext cx="1173600" cy="216000"/>
+            <a:off x="4088159" y="4219200"/>
+            <a:ext cx="1000079" cy="216000"/>
           </a:xfrm>
           <a:prstGeom prst="rect">
             <a:avLst/>
@@ -8400,8 +8400,8 @@
         </p:nvSpPr>
         <p:spPr>
           <a:xfrm>
-            <a:off x="5659200" y="4089600"/>
-            <a:ext cx="1173600" cy="475200"/>
+            <a:off x="5138640" y="4089600"/>
+            <a:ext cx="1000079" cy="475200"/>
           </a:xfrm>
           <a:prstGeom prst="rect">
             <a:avLst/>
@@ -8444,8 +8444,8 @@
         </p:nvSpPr>
         <p:spPr>
           <a:xfrm>
-            <a:off x="5659200" y="4219200"/>
-            <a:ext cx="1173600" cy="216000"/>
+            <a:off x="5138640" y="4219200"/>
+            <a:ext cx="1000079" cy="216000"/>
           </a:xfrm>
           <a:prstGeom prst="rect">
             <a:avLst/>
@@ -8483,8 +8483,8 @@
         </p:nvSpPr>
         <p:spPr>
           <a:xfrm>
-            <a:off x="6883199" y="4089600"/>
-            <a:ext cx="1173600" cy="475200"/>
+            <a:off x="6189120" y="4089600"/>
+            <a:ext cx="1000079" cy="475200"/>
           </a:xfrm>
           <a:prstGeom prst="rect">
             <a:avLst/>
@@ -8527,8 +8527,8 @@
         </p:nvSpPr>
         <p:spPr>
           <a:xfrm>
-            <a:off x="6883199" y="4219200"/>
-            <a:ext cx="1173600" cy="216000"/>
+            <a:off x="6189120" y="4219200"/>
+            <a:ext cx="1000079" cy="216000"/>
           </a:xfrm>
           <a:prstGeom prst="rect">
             <a:avLst/>
@@ -8952,7 +8952,7 @@
         <p:spPr>
           <a:xfrm>
             <a:off x="2379600" y="1105200"/>
-            <a:ext cx="5040000" cy="503999"/>
+            <a:ext cx="5040000" cy="612000"/>
           </a:xfrm>
           <a:prstGeom prst="rect">
             <a:avLst/>
@@ -9030,7 +9030,7 @@
         <p:spPr>
           <a:xfrm>
             <a:off x="799200" y="2736000"/>
-            <a:ext cx="8640000" cy="1620000"/>
+            <a:ext cx="8640000" cy="1172698"/>
           </a:xfrm>
           <a:prstGeom prst="rect">
             <a:avLst/>
@@ -10120,7 +10120,7 @@
         <p:spPr>
           <a:xfrm>
             <a:off x="1015200" y="1890000"/>
-            <a:ext cx="2895240" cy="3240000"/>
+            <a:ext cx="2895240" cy="3276000"/>
           </a:xfrm>
           <a:prstGeom prst="rect">
             <a:avLst/>
@@ -10348,7 +10348,7 @@
         <p:spPr>
           <a:xfrm>
             <a:off x="4648440" y="1890000"/>
-            <a:ext cx="2895240" cy="3240000"/>
+            <a:ext cx="2895240" cy="3276000"/>
           </a:xfrm>
           <a:prstGeom prst="rect">
             <a:avLst/>
@@ -10576,7 +10576,7 @@
         <p:spPr>
           <a:xfrm>
             <a:off x="8281679" y="1890000"/>
-            <a:ext cx="2895240" cy="3240000"/>
+            <a:ext cx="2895240" cy="3276000"/>
           </a:xfrm>
           <a:prstGeom prst="rect">
             <a:avLst/>
@@ -12072,7 +12072,7 @@
                     <a:lstStyle/>
                     <a:p>
                       <a:r>
-                        <a:rPr sz="1100">
+                        <a:rPr sz="1100" b="0">
                           <a:solidFill>
                             <a:srgbClr val="1F2937"/>
                           </a:solidFill>
@@ -12094,7 +12094,7 @@
                     <a:lstStyle/>
                     <a:p>
                       <a:r>
-                        <a:rPr sz="1100">
+                        <a:rPr sz="1100" b="0">
                           <a:solidFill>
                             <a:srgbClr val="1F2937"/>
                           </a:solidFill>
@@ -12116,7 +12116,7 @@
                     <a:lstStyle/>
                     <a:p>
                       <a:r>
-                        <a:rPr sz="1100">
+                        <a:rPr sz="1100" b="0">
                           <a:solidFill>
                             <a:srgbClr val="1F2937"/>
                           </a:solidFill>
@@ -12140,7 +12140,7 @@
                     <a:lstStyle/>
                     <a:p>
                       <a:r>
-                        <a:rPr sz="1100">
+                        <a:rPr sz="1100" b="0">
                           <a:solidFill>
                             <a:srgbClr val="1F2937"/>
                           </a:solidFill>
@@ -12162,7 +12162,7 @@
                     <a:lstStyle/>
                     <a:p>
                       <a:r>
-                        <a:rPr sz="1100">
+                        <a:rPr sz="1100" b="0">
                           <a:solidFill>
                             <a:srgbClr val="1F2937"/>
                           </a:solidFill>
@@ -12184,7 +12184,7 @@
                     <a:lstStyle/>
                     <a:p>
                       <a:r>
-                        <a:rPr sz="1100">
+                        <a:rPr sz="1100" b="0">
                           <a:solidFill>
                             <a:srgbClr val="1F2937"/>
                           </a:solidFill>
@@ -12208,7 +12208,7 @@
                     <a:lstStyle/>
                     <a:p>
                       <a:r>
-                        <a:rPr sz="1100">
+                        <a:rPr sz="1100" b="0">
                           <a:solidFill>
                             <a:srgbClr val="1F2937"/>
                           </a:solidFill>
@@ -12230,7 +12230,7 @@
                     <a:lstStyle/>
                     <a:p>
                       <a:r>
-                        <a:rPr sz="1100">
+                        <a:rPr sz="1100" b="0">
                           <a:solidFill>
                             <a:srgbClr val="1F2937"/>
                           </a:solidFill>
@@ -12252,7 +12252,7 @@
                     <a:lstStyle/>
                     <a:p>
                       <a:r>
-                        <a:rPr sz="1100">
+                        <a:rPr sz="1100" b="0">
                           <a:solidFill>
                             <a:srgbClr val="1F2937"/>
                           </a:solidFill>
@@ -12276,7 +12276,7 @@
                     <a:lstStyle/>
                     <a:p>
                       <a:r>
-                        <a:rPr sz="1100">
+                        <a:rPr sz="1100" b="0">
                           <a:solidFill>
                             <a:srgbClr val="1F2937"/>
                           </a:solidFill>
@@ -12298,7 +12298,7 @@
                     <a:lstStyle/>
                     <a:p>
                       <a:r>
-                        <a:rPr sz="1100">
+                        <a:rPr sz="1100" b="0">
                           <a:solidFill>
                             <a:srgbClr val="1F2937"/>
                           </a:solidFill>
@@ -12320,7 +12320,7 @@
                     <a:lstStyle/>
                     <a:p>
                       <a:r>
-                        <a:rPr sz="1100">
+                        <a:rPr sz="1100" b="0">
                           <a:solidFill>
                             <a:srgbClr val="1F2937"/>
                           </a:solidFill>
@@ -12344,7 +12344,7 @@
                     <a:lstStyle/>
                     <a:p>
                       <a:r>
-                        <a:rPr sz="1100">
+                        <a:rPr sz="1100" b="0">
                           <a:solidFill>
                             <a:srgbClr val="1F2937"/>
                           </a:solidFill>
@@ -12366,7 +12366,7 @@
                     <a:lstStyle/>
                     <a:p>
                       <a:r>
-                        <a:rPr sz="1100">
+                        <a:rPr sz="1100" b="0">
                           <a:solidFill>
                             <a:srgbClr val="1F2937"/>
                           </a:solidFill>
@@ -12388,7 +12388,7 @@
                     <a:lstStyle/>
                     <a:p>
                       <a:r>
-                        <a:rPr sz="1100">
+                        <a:rPr sz="1100" b="0">
                           <a:solidFill>
                             <a:srgbClr val="1F2937"/>
                           </a:solidFill>
@@ -12418,7 +12418,7 @@
         <p:spPr>
           <a:xfrm>
             <a:off x="799200" y="3780000"/>
-            <a:ext cx="10593719" cy="432000"/>
+            <a:ext cx="10593719" cy="503999"/>
           </a:xfrm>
           <a:prstGeom prst="rect">
             <a:avLst/>
@@ -12685,7 +12685,7 @@
         <p:spPr>
           <a:xfrm>
             <a:off x="2379600" y="1105200"/>
-            <a:ext cx="5040000" cy="503999"/>
+            <a:ext cx="5040000" cy="612000"/>
           </a:xfrm>
           <a:prstGeom prst="rect">
             <a:avLst/>
@@ -12763,7 +12763,7 @@
         <p:spPr>
           <a:xfrm>
             <a:off x="799200" y="2736000"/>
-            <a:ext cx="8640000" cy="1620000"/>
+            <a:ext cx="8640000" cy="1172698"/>
           </a:xfrm>
           <a:prstGeom prst="rect">
             <a:avLst/>
@@ -15264,7 +15264,7 @@
         <p:spPr>
           <a:xfrm>
             <a:off x="997200" y="1584000"/>
-            <a:ext cx="4789259" cy="3528000"/>
+            <a:ext cx="4789259" cy="3582000"/>
           </a:xfrm>
           <a:prstGeom prst="rect">
             <a:avLst/>
@@ -15702,7 +15702,7 @@
         <p:spPr>
           <a:xfrm>
             <a:off x="6405659" y="1584000"/>
-            <a:ext cx="4789259" cy="3528000"/>
+            <a:ext cx="4789259" cy="3582000"/>
           </a:xfrm>
           <a:prstGeom prst="rect">
             <a:avLst/>
@@ -16402,7 +16402,7 @@
         <p:spPr>
           <a:xfrm>
             <a:off x="1047600" y="2163600"/>
-            <a:ext cx="2361600" cy="388800"/>
+            <a:ext cx="2361600" cy="496800"/>
           </a:xfrm>
           <a:prstGeom prst="rect">
             <a:avLst/>
@@ -16441,7 +16441,7 @@
         <p:spPr>
           <a:xfrm>
             <a:off x="1047600" y="2628000"/>
-            <a:ext cx="2361600" cy="190800"/>
+            <a:ext cx="2361600" cy="280800"/>
           </a:xfrm>
           <a:prstGeom prst="rect">
             <a:avLst/>
@@ -18602,7 +18602,7 @@
                     <a:lstStyle/>
                     <a:p>
                       <a:r>
-                        <a:rPr sz="1050">
+                        <a:rPr sz="1050" b="0">
                           <a:solidFill>
                             <a:srgbClr val="1F2937"/>
                           </a:solidFill>
@@ -18624,7 +18624,7 @@
                     <a:lstStyle/>
                     <a:p>
                       <a:r>
-                        <a:rPr sz="1050">
+                        <a:rPr sz="1050" b="0">
                           <a:solidFill>
                             <a:srgbClr val="1F2937"/>
                           </a:solidFill>
@@ -18646,7 +18646,7 @@
                     <a:lstStyle/>
                     <a:p>
                       <a:r>
-                        <a:rPr sz="1050">
+                        <a:rPr sz="1050" b="0">
                           <a:solidFill>
                             <a:srgbClr val="1F2937"/>
                           </a:solidFill>
@@ -18668,7 +18668,7 @@
                     <a:lstStyle/>
                     <a:p>
                       <a:r>
-                        <a:rPr sz="1050">
+                        <a:rPr sz="1050" b="0">
                           <a:solidFill>
                             <a:srgbClr val="1F2937"/>
                           </a:solidFill>
@@ -18690,7 +18690,7 @@
                     <a:lstStyle/>
                     <a:p>
                       <a:r>
-                        <a:rPr sz="1050">
+                        <a:rPr sz="1050" b="0">
                           <a:solidFill>
                             <a:srgbClr val="1F2937"/>
                           </a:solidFill>
@@ -18712,7 +18712,7 @@
                     <a:lstStyle/>
                     <a:p>
                       <a:r>
-                        <a:rPr sz="1050">
+                        <a:rPr sz="1050" b="0">
                           <a:solidFill>
                             <a:srgbClr val="1F2937"/>
                           </a:solidFill>
@@ -18736,7 +18736,7 @@
                     <a:lstStyle/>
                     <a:p>
                       <a:r>
-                        <a:rPr sz="1050">
+                        <a:rPr sz="1050" b="0">
                           <a:solidFill>
                             <a:srgbClr val="1F2937"/>
                           </a:solidFill>
@@ -18758,7 +18758,7 @@
                     <a:lstStyle/>
                     <a:p>
                       <a:r>
-                        <a:rPr sz="1050">
+                        <a:rPr sz="1050" b="0">
                           <a:solidFill>
                             <a:srgbClr val="1F2937"/>
                           </a:solidFill>
@@ -18780,7 +18780,7 @@
                     <a:lstStyle/>
                     <a:p>
                       <a:r>
-                        <a:rPr sz="1050">
+                        <a:rPr sz="1050" b="0">
                           <a:solidFill>
                             <a:srgbClr val="1F2937"/>
                           </a:solidFill>
@@ -18802,7 +18802,7 @@
                     <a:lstStyle/>
                     <a:p>
                       <a:r>
-                        <a:rPr sz="1050">
+                        <a:rPr sz="1050" b="0">
                           <a:solidFill>
                             <a:srgbClr val="1F2937"/>
                           </a:solidFill>
@@ -18824,7 +18824,7 @@
                     <a:lstStyle/>
                     <a:p>
                       <a:r>
-                        <a:rPr sz="1050">
+                        <a:rPr sz="1050" b="0">
                           <a:solidFill>
                             <a:srgbClr val="1F2937"/>
                           </a:solidFill>
@@ -18846,7 +18846,7 @@
                     <a:lstStyle/>
                     <a:p>
                       <a:r>
-                        <a:rPr sz="1050">
+                        <a:rPr sz="1050" b="0">
                           <a:solidFill>
                             <a:srgbClr val="1F2937"/>
                           </a:solidFill>
@@ -18870,7 +18870,7 @@
                     <a:lstStyle/>
                     <a:p>
                       <a:r>
-                        <a:rPr sz="1050">
+                        <a:rPr sz="1050" b="0">
                           <a:solidFill>
                             <a:srgbClr val="1F2937"/>
                           </a:solidFill>
@@ -18892,7 +18892,7 @@
                     <a:lstStyle/>
                     <a:p>
                       <a:r>
-                        <a:rPr sz="1050">
+                        <a:rPr sz="1050" b="0">
                           <a:solidFill>
                             <a:srgbClr val="1F2937"/>
                           </a:solidFill>
@@ -18914,7 +18914,7 @@
                     <a:lstStyle/>
                     <a:p>
                       <a:r>
-                        <a:rPr sz="1050">
+                        <a:rPr sz="1050" b="0">
                           <a:solidFill>
                             <a:srgbClr val="1F2937"/>
                           </a:solidFill>
@@ -18936,7 +18936,7 @@
                     <a:lstStyle/>
                     <a:p>
                       <a:r>
-                        <a:rPr sz="1050">
+                        <a:rPr sz="1050" b="0">
                           <a:solidFill>
                             <a:srgbClr val="1F2937"/>
                           </a:solidFill>
@@ -18958,7 +18958,7 @@
                     <a:lstStyle/>
                     <a:p>
                       <a:r>
-                        <a:rPr sz="1050">
+                        <a:rPr sz="1050" b="0">
                           <a:solidFill>
                             <a:srgbClr val="1F2937"/>
                           </a:solidFill>
@@ -18980,7 +18980,7 @@
                     <a:lstStyle/>
                     <a:p>
                       <a:r>
-                        <a:rPr sz="1050">
+                        <a:rPr sz="1050" b="0">
                           <a:solidFill>
                             <a:srgbClr val="1F2937"/>
                           </a:solidFill>
@@ -19004,7 +19004,7 @@
                     <a:lstStyle/>
                     <a:p>
                       <a:r>
-                        <a:rPr sz="1050">
+                        <a:rPr sz="1050" b="0">
                           <a:solidFill>
                             <a:srgbClr val="1F2937"/>
                           </a:solidFill>
@@ -19026,7 +19026,7 @@
                     <a:lstStyle/>
                     <a:p>
                       <a:r>
-                        <a:rPr sz="1050">
+                        <a:rPr sz="1050" b="0">
                           <a:solidFill>
                             <a:srgbClr val="1F2937"/>
                           </a:solidFill>
@@ -19048,7 +19048,7 @@
                     <a:lstStyle/>
                     <a:p>
                       <a:r>
-                        <a:rPr sz="1050">
+                        <a:rPr sz="1050" b="0">
                           <a:solidFill>
                             <a:srgbClr val="1F2937"/>
                           </a:solidFill>
@@ -19070,7 +19070,7 @@
                     <a:lstStyle/>
                     <a:p>
                       <a:r>
-                        <a:rPr sz="1050">
+                        <a:rPr sz="1050" b="0">
                           <a:solidFill>
                             <a:srgbClr val="1F2937"/>
                           </a:solidFill>
@@ -19092,7 +19092,7 @@
                     <a:lstStyle/>
                     <a:p>
                       <a:r>
-                        <a:rPr sz="1050">
+                        <a:rPr sz="1050" b="0">
                           <a:solidFill>
                             <a:srgbClr val="1F2937"/>
                           </a:solidFill>
@@ -19114,7 +19114,7 @@
                     <a:lstStyle/>
                     <a:p>
                       <a:r>
-                        <a:rPr sz="1050">
+                        <a:rPr sz="1050" b="0">
                           <a:solidFill>
                             <a:srgbClr val="1F2937"/>
                           </a:solidFill>
@@ -19138,7 +19138,7 @@
                     <a:lstStyle/>
                     <a:p>
                       <a:r>
-                        <a:rPr sz="1050">
+                        <a:rPr sz="1050" b="0">
                           <a:solidFill>
                             <a:srgbClr val="1F2937"/>
                           </a:solidFill>
@@ -19160,7 +19160,7 @@
                     <a:lstStyle/>
                     <a:p>
                       <a:r>
-                        <a:rPr sz="1050">
+                        <a:rPr sz="1050" b="0">
                           <a:solidFill>
                             <a:srgbClr val="1F2937"/>
                           </a:solidFill>
@@ -19182,7 +19182,7 @@
                     <a:lstStyle/>
                     <a:p>
                       <a:r>
-                        <a:rPr sz="1050">
+                        <a:rPr sz="1050" b="0">
                           <a:solidFill>
                             <a:srgbClr val="1F2937"/>
                           </a:solidFill>
@@ -19204,7 +19204,7 @@
                     <a:lstStyle/>
                     <a:p>
                       <a:r>
-                        <a:rPr sz="1050">
+                        <a:rPr sz="1050" b="0">
                           <a:solidFill>
                             <a:srgbClr val="1F2937"/>
                           </a:solidFill>
@@ -19226,7 +19226,7 @@
                     <a:lstStyle/>
                     <a:p>
                       <a:r>
-                        <a:rPr sz="1050">
+                        <a:rPr sz="1050" b="0">
                           <a:solidFill>
                             <a:srgbClr val="1F2937"/>
                           </a:solidFill>
@@ -19248,7 +19248,7 @@
                     <a:lstStyle/>
                     <a:p>
                       <a:r>
-                        <a:rPr sz="1050">
+                        <a:rPr sz="1050" b="0">
                           <a:solidFill>
                             <a:srgbClr val="1F2937"/>
                           </a:solidFill>
@@ -19272,7 +19272,7 @@
                     <a:lstStyle/>
                     <a:p>
                       <a:r>
-                        <a:rPr sz="1050">
+                        <a:rPr sz="1050" b="0">
                           <a:solidFill>
                             <a:srgbClr val="1F2937"/>
                           </a:solidFill>
@@ -19294,7 +19294,7 @@
                     <a:lstStyle/>
                     <a:p>
                       <a:r>
-                        <a:rPr sz="1050">
+                        <a:rPr sz="1050" b="0">
                           <a:solidFill>
                             <a:srgbClr val="1F2937"/>
                           </a:solidFill>
@@ -19316,7 +19316,7 @@
                     <a:lstStyle/>
                     <a:p>
                       <a:r>
-                        <a:rPr sz="1050">
+                        <a:rPr sz="1050" b="0">
                           <a:solidFill>
                             <a:srgbClr val="1F2937"/>
                           </a:solidFill>
@@ -19338,7 +19338,7 @@
                     <a:lstStyle/>
                     <a:p>
                       <a:r>
-                        <a:rPr sz="1050">
+                        <a:rPr sz="1050" b="0">
                           <a:solidFill>
                             <a:srgbClr val="1F2937"/>
                           </a:solidFill>
@@ -19360,7 +19360,7 @@
                     <a:lstStyle/>
                     <a:p>
                       <a:r>
-                        <a:rPr sz="1050">
+                        <a:rPr sz="1050" b="0">
                           <a:solidFill>
                             <a:srgbClr val="1F2937"/>
                           </a:solidFill>
@@ -19382,7 +19382,7 @@
                     <a:lstStyle/>
                     <a:p>
                       <a:r>
-                        <a:rPr sz="1050">
+                        <a:rPr sz="1050" b="0">
                           <a:solidFill>
                             <a:srgbClr val="1F2937"/>
                           </a:solidFill>
@@ -19412,7 +19412,7 @@
         <p:spPr>
           <a:xfrm>
             <a:off x="799200" y="4193999"/>
-            <a:ext cx="10593719" cy="432000"/>
+            <a:ext cx="10593719" cy="503999"/>
           </a:xfrm>
           <a:prstGeom prst="rect">
             <a:avLst/>
@@ -20008,22 +20008,22 @@
         <p:spPr>
           <a:xfrm>
             <a:off x="2023200" y="1493999"/>
-            <a:ext cx="9153719" cy="341999"/>
-          </a:xfrm>
-          <a:prstGeom prst="rect">
-            <a:avLst/>
-          </a:prstGeom>
-          <a:noFill/>
-        </p:spPr>
-        <p:txBody>
-          <a:bodyPr wrap="square" anchor="t" lIns="0" rIns="0" tIns="0" bIns="0">
-            <a:spAutoFit/>
-          </a:bodyPr>
-          <a:lstStyle/>
-          <a:p>
-            <a:pPr algn="l">
-              <a:lnSpc>
-                <a:spcPct val="135000"/>
+            <a:ext cx="9153719" cy="342000"/>
+          </a:xfrm>
+          <a:prstGeom prst="rect">
+            <a:avLst/>
+          </a:prstGeom>
+          <a:noFill/>
+        </p:spPr>
+        <p:txBody>
+          <a:bodyPr wrap="square" anchor="t" lIns="0" rIns="0" tIns="0" bIns="0">
+            <a:spAutoFit/>
+          </a:bodyPr>
+          <a:lstStyle/>
+          <a:p>
+            <a:pPr algn="l">
+              <a:lnSpc>
+                <a:spcPct val="130000"/>
               </a:lnSpc>
             </a:pPr>
             <a:r>
@@ -20274,7 +20274,7 @@
           <a:p>
             <a:pPr algn="l">
               <a:lnSpc>
-                <a:spcPct val="135000"/>
+                <a:spcPct val="130000"/>
               </a:lnSpc>
             </a:pPr>
             <a:r>
@@ -20510,22 +20510,22 @@
         <p:spPr>
           <a:xfrm>
             <a:off x="2023200" y="3272399"/>
-            <a:ext cx="9153719" cy="341999"/>
-          </a:xfrm>
-          <a:prstGeom prst="rect">
-            <a:avLst/>
-          </a:prstGeom>
-          <a:noFill/>
-        </p:spPr>
-        <p:txBody>
-          <a:bodyPr wrap="square" anchor="t" lIns="0" rIns="0" tIns="0" bIns="0">
-            <a:spAutoFit/>
-          </a:bodyPr>
-          <a:lstStyle/>
-          <a:p>
-            <a:pPr algn="l">
-              <a:lnSpc>
-                <a:spcPct val="135000"/>
+            <a:ext cx="9153719" cy="342000"/>
+          </a:xfrm>
+          <a:prstGeom prst="rect">
+            <a:avLst/>
+          </a:prstGeom>
+          <a:noFill/>
+        </p:spPr>
+        <p:txBody>
+          <a:bodyPr wrap="square" anchor="t" lIns="0" rIns="0" tIns="0" bIns="0">
+            <a:spAutoFit/>
+          </a:bodyPr>
+          <a:lstStyle/>
+          <a:p>
+            <a:pPr algn="l">
+              <a:lnSpc>
+                <a:spcPct val="130000"/>
               </a:lnSpc>
             </a:pPr>
             <a:r>
@@ -20777,7 +20777,7 @@
         <p:spPr>
           <a:xfrm>
             <a:off x="2379600" y="1105200"/>
-            <a:ext cx="5040000" cy="503999"/>
+            <a:ext cx="5040000" cy="612000"/>
           </a:xfrm>
           <a:prstGeom prst="rect">
             <a:avLst/>
@@ -20855,7 +20855,7 @@
         <p:spPr>
           <a:xfrm>
             <a:off x="799200" y="2736000"/>
-            <a:ext cx="8640000" cy="1620000"/>
+            <a:ext cx="8640000" cy="1172698"/>
           </a:xfrm>
           <a:prstGeom prst="rect">
             <a:avLst/>
@@ -23051,7 +23051,7 @@
                     <a:lstStyle/>
                     <a:p>
                       <a:r>
-                        <a:rPr sz="1100">
+                        <a:rPr sz="1100" b="0">
                           <a:solidFill>
                             <a:srgbClr val="1F2937"/>
                           </a:solidFill>
@@ -23073,7 +23073,7 @@
                     <a:lstStyle/>
                     <a:p>
                       <a:r>
-                        <a:rPr sz="1100">
+                        <a:rPr sz="1100" b="0">
                           <a:solidFill>
                             <a:srgbClr val="1F2937"/>
                           </a:solidFill>
@@ -23095,7 +23095,7 @@
                     <a:lstStyle/>
                     <a:p>
                       <a:r>
-                        <a:rPr sz="1100">
+                        <a:rPr sz="1100" b="0">
                           <a:solidFill>
                             <a:srgbClr val="1F2937"/>
                           </a:solidFill>
@@ -23119,7 +23119,7 @@
                     <a:lstStyle/>
                     <a:p>
                       <a:r>
-                        <a:rPr sz="1100">
+                        <a:rPr sz="1100" b="0">
                           <a:solidFill>
                             <a:srgbClr val="1F2937"/>
                           </a:solidFill>
@@ -23141,7 +23141,7 @@
                     <a:lstStyle/>
                     <a:p>
                       <a:r>
-                        <a:rPr sz="1100">
+                        <a:rPr sz="1100" b="0">
                           <a:solidFill>
                             <a:srgbClr val="1F2937"/>
                           </a:solidFill>
@@ -23163,7 +23163,7 @@
                     <a:lstStyle/>
                     <a:p>
                       <a:r>
-                        <a:rPr sz="1100">
+                        <a:rPr sz="1100" b="0">
                           <a:solidFill>
                             <a:srgbClr val="1F2937"/>
                           </a:solidFill>
@@ -23187,7 +23187,7 @@
                     <a:lstStyle/>
                     <a:p>
                       <a:r>
-                        <a:rPr sz="1100">
+                        <a:rPr sz="1100" b="0">
                           <a:solidFill>
                             <a:srgbClr val="1F2937"/>
                           </a:solidFill>
@@ -23209,7 +23209,7 @@
                     <a:lstStyle/>
                     <a:p>
                       <a:r>
-                        <a:rPr sz="1100">
+                        <a:rPr sz="1100" b="0">
                           <a:solidFill>
                             <a:srgbClr val="1F2937"/>
                           </a:solidFill>
@@ -23231,7 +23231,7 @@
                     <a:lstStyle/>
                     <a:p>
                       <a:r>
-                        <a:rPr sz="1100">
+                        <a:rPr sz="1100" b="0">
                           <a:solidFill>
                             <a:srgbClr val="1F2937"/>
                           </a:solidFill>
@@ -23255,7 +23255,7 @@
                     <a:lstStyle/>
                     <a:p>
                       <a:r>
-                        <a:rPr sz="1100">
+                        <a:rPr sz="1100" b="0">
                           <a:solidFill>
                             <a:srgbClr val="1F2937"/>
                           </a:solidFill>
@@ -23277,7 +23277,7 @@
                     <a:lstStyle/>
                     <a:p>
                       <a:r>
-                        <a:rPr sz="1100">
+                        <a:rPr sz="1100" b="0">
                           <a:solidFill>
                             <a:srgbClr val="1F2937"/>
                           </a:solidFill>
@@ -23299,7 +23299,7 @@
                     <a:lstStyle/>
                     <a:p>
                       <a:r>
-                        <a:rPr sz="1100">
+                        <a:rPr sz="1100" b="0">
                           <a:solidFill>
                             <a:srgbClr val="1F2937"/>
                           </a:solidFill>
@@ -23323,7 +23323,7 @@
                     <a:lstStyle/>
                     <a:p>
                       <a:r>
-                        <a:rPr sz="1100">
+                        <a:rPr sz="1100" b="0">
                           <a:solidFill>
                             <a:srgbClr val="1F2937"/>
                           </a:solidFill>
@@ -23345,7 +23345,7 @@
                     <a:lstStyle/>
                     <a:p>
                       <a:r>
-                        <a:rPr sz="1100">
+                        <a:rPr sz="1100" b="0">
                           <a:solidFill>
                             <a:srgbClr val="1F2937"/>
                           </a:solidFill>
@@ -23367,7 +23367,7 @@
                     <a:lstStyle/>
                     <a:p>
                       <a:r>
-                        <a:rPr sz="1100">
+                        <a:rPr sz="1100" b="0">
                           <a:solidFill>
                             <a:srgbClr val="1F2937"/>
                           </a:solidFill>
@@ -23397,7 +23397,7 @@
         <p:spPr>
           <a:xfrm>
             <a:off x="799200" y="3780000"/>
-            <a:ext cx="10593719" cy="432000"/>
+            <a:ext cx="10593719" cy="503999"/>
           </a:xfrm>
           <a:prstGeom prst="rect">
             <a:avLst/>
@@ -23910,22 +23910,22 @@
         <p:spPr>
           <a:xfrm>
             <a:off x="2005200" y="1296000"/>
-            <a:ext cx="3793859" cy="540000"/>
-          </a:xfrm>
-          <a:prstGeom prst="rect">
-            <a:avLst/>
-          </a:prstGeom>
-          <a:noFill/>
-        </p:spPr>
-        <p:txBody>
-          <a:bodyPr wrap="square" anchor="t" lIns="0" rIns="0" tIns="0" bIns="0">
-            <a:spAutoFit/>
-          </a:bodyPr>
-          <a:lstStyle/>
-          <a:p>
-            <a:pPr algn="l">
-              <a:lnSpc>
-                <a:spcPct val="130000"/>
+            <a:ext cx="3793859" cy="839518"/>
+          </a:xfrm>
+          <a:prstGeom prst="rect">
+            <a:avLst/>
+          </a:prstGeom>
+          <a:noFill/>
+        </p:spPr>
+        <p:txBody>
+          <a:bodyPr wrap="square" anchor="t" lIns="0" rIns="0" tIns="0" bIns="0">
+            <a:spAutoFit/>
+          </a:bodyPr>
+          <a:lstStyle/>
+          <a:p>
+            <a:pPr algn="l">
+              <a:lnSpc>
+                <a:spcPct val="128000"/>
               </a:lnSpc>
             </a:pPr>
             <a:r>
@@ -23949,22 +23949,22 @@
         <p:spPr>
           <a:xfrm>
             <a:off x="997200" y="1908000"/>
-            <a:ext cx="4801859" cy="1629000"/>
-          </a:xfrm>
-          <a:prstGeom prst="rect">
-            <a:avLst/>
-          </a:prstGeom>
-          <a:noFill/>
-        </p:spPr>
-        <p:txBody>
-          <a:bodyPr wrap="square" anchor="t" lIns="0" rIns="0" tIns="0" bIns="0">
-            <a:spAutoFit/>
-          </a:bodyPr>
-          <a:lstStyle/>
-          <a:p>
-            <a:pPr algn="l">
-              <a:lnSpc>
-                <a:spcPct val="140000"/>
+            <a:ext cx="4801859" cy="1647000"/>
+          </a:xfrm>
+          <a:prstGeom prst="rect">
+            <a:avLst/>
+          </a:prstGeom>
+          <a:noFill/>
+        </p:spPr>
+        <p:txBody>
+          <a:bodyPr wrap="square" anchor="t" lIns="0" rIns="0" tIns="0" bIns="0">
+            <a:spAutoFit/>
+          </a:bodyPr>
+          <a:lstStyle/>
+          <a:p>
+            <a:pPr algn="l">
+              <a:lnSpc>
+                <a:spcPct val="134000"/>
               </a:lnSpc>
               <a:spcAft>
                 <a:spcPts val="300"/>
@@ -23983,7 +23983,7 @@
           <a:p>
             <a:pPr algn="l">
               <a:lnSpc>
-                <a:spcPct val="140000"/>
+                <a:spcPct val="134000"/>
               </a:lnSpc>
               <a:spcAft>
                 <a:spcPts val="300"/>
@@ -24002,7 +24002,7 @@
           <a:p>
             <a:pPr algn="l">
               <a:lnSpc>
-                <a:spcPct val="140000"/>
+                <a:spcPct val="134000"/>
               </a:lnSpc>
               <a:spcAft>
                 <a:spcPts val="300"/>
@@ -24021,7 +24021,7 @@
           <a:p>
             <a:pPr algn="l">
               <a:lnSpc>
-                <a:spcPct val="140000"/>
+                <a:spcPct val="134000"/>
               </a:lnSpc>
               <a:spcAft>
                 <a:spcPts val="300"/>
@@ -24177,22 +24177,22 @@
         <p:spPr>
           <a:xfrm>
             <a:off x="7401059" y="1296000"/>
-            <a:ext cx="3793859" cy="540000"/>
-          </a:xfrm>
-          <a:prstGeom prst="rect">
-            <a:avLst/>
-          </a:prstGeom>
-          <a:noFill/>
-        </p:spPr>
-        <p:txBody>
-          <a:bodyPr wrap="square" anchor="t" lIns="0" rIns="0" tIns="0" bIns="0">
-            <a:spAutoFit/>
-          </a:bodyPr>
-          <a:lstStyle/>
-          <a:p>
-            <a:pPr algn="l">
-              <a:lnSpc>
-                <a:spcPct val="130000"/>
+            <a:ext cx="3793859" cy="839518"/>
+          </a:xfrm>
+          <a:prstGeom prst="rect">
+            <a:avLst/>
+          </a:prstGeom>
+          <a:noFill/>
+        </p:spPr>
+        <p:txBody>
+          <a:bodyPr wrap="square" anchor="t" lIns="0" rIns="0" tIns="0" bIns="0">
+            <a:spAutoFit/>
+          </a:bodyPr>
+          <a:lstStyle/>
+          <a:p>
+            <a:pPr algn="l">
+              <a:lnSpc>
+                <a:spcPct val="128000"/>
               </a:lnSpc>
             </a:pPr>
             <a:r>
@@ -24216,22 +24216,22 @@
         <p:spPr>
           <a:xfrm>
             <a:off x="6393059" y="1908000"/>
-            <a:ext cx="4801859" cy="1629000"/>
-          </a:xfrm>
-          <a:prstGeom prst="rect">
-            <a:avLst/>
-          </a:prstGeom>
-          <a:noFill/>
-        </p:spPr>
-        <p:txBody>
-          <a:bodyPr wrap="square" anchor="t" lIns="0" rIns="0" tIns="0" bIns="0">
-            <a:spAutoFit/>
-          </a:bodyPr>
-          <a:lstStyle/>
-          <a:p>
-            <a:pPr algn="l">
-              <a:lnSpc>
-                <a:spcPct val="140000"/>
+            <a:ext cx="4801859" cy="1647000"/>
+          </a:xfrm>
+          <a:prstGeom prst="rect">
+            <a:avLst/>
+          </a:prstGeom>
+          <a:noFill/>
+        </p:spPr>
+        <p:txBody>
+          <a:bodyPr wrap="square" anchor="t" lIns="0" rIns="0" tIns="0" bIns="0">
+            <a:spAutoFit/>
+          </a:bodyPr>
+          <a:lstStyle/>
+          <a:p>
+            <a:pPr algn="l">
+              <a:lnSpc>
+                <a:spcPct val="134000"/>
               </a:lnSpc>
               <a:spcAft>
                 <a:spcPts val="300"/>
@@ -24250,7 +24250,7 @@
           <a:p>
             <a:pPr algn="l">
               <a:lnSpc>
-                <a:spcPct val="140000"/>
+                <a:spcPct val="134000"/>
               </a:lnSpc>
               <a:spcAft>
                 <a:spcPts val="300"/>
@@ -24269,7 +24269,7 @@
           <a:p>
             <a:pPr algn="l">
               <a:lnSpc>
-                <a:spcPct val="140000"/>
+                <a:spcPct val="134000"/>
               </a:lnSpc>
               <a:spcAft>
                 <a:spcPts val="300"/>
@@ -24288,7 +24288,7 @@
           <a:p>
             <a:pPr algn="l">
               <a:lnSpc>
-                <a:spcPct val="140000"/>
+                <a:spcPct val="134000"/>
               </a:lnSpc>
               <a:spcAft>
                 <a:spcPts val="300"/>
@@ -24444,22 +24444,22 @@
         <p:spPr>
           <a:xfrm>
             <a:off x="2005200" y="3986999"/>
-            <a:ext cx="3793859" cy="540000"/>
-          </a:xfrm>
-          <a:prstGeom prst="rect">
-            <a:avLst/>
-          </a:prstGeom>
-          <a:noFill/>
-        </p:spPr>
-        <p:txBody>
-          <a:bodyPr wrap="square" anchor="t" lIns="0" rIns="0" tIns="0" bIns="0">
-            <a:spAutoFit/>
-          </a:bodyPr>
-          <a:lstStyle/>
-          <a:p>
-            <a:pPr algn="l">
-              <a:lnSpc>
-                <a:spcPct val="130000"/>
+            <a:ext cx="3793859" cy="595679"/>
+          </a:xfrm>
+          <a:prstGeom prst="rect">
+            <a:avLst/>
+          </a:prstGeom>
+          <a:noFill/>
+        </p:spPr>
+        <p:txBody>
+          <a:bodyPr wrap="square" anchor="t" lIns="0" rIns="0" tIns="0" bIns="0">
+            <a:spAutoFit/>
+          </a:bodyPr>
+          <a:lstStyle/>
+          <a:p>
+            <a:pPr algn="l">
+              <a:lnSpc>
+                <a:spcPct val="128000"/>
               </a:lnSpc>
             </a:pPr>
             <a:r>
@@ -24483,22 +24483,22 @@
         <p:spPr>
           <a:xfrm>
             <a:off x="997200" y="4599000"/>
-            <a:ext cx="4801859" cy="1629000"/>
-          </a:xfrm>
-          <a:prstGeom prst="rect">
-            <a:avLst/>
-          </a:prstGeom>
-          <a:noFill/>
-        </p:spPr>
-        <p:txBody>
-          <a:bodyPr wrap="square" anchor="t" lIns="0" rIns="0" tIns="0" bIns="0">
-            <a:spAutoFit/>
-          </a:bodyPr>
-          <a:lstStyle/>
-          <a:p>
-            <a:pPr algn="l">
-              <a:lnSpc>
-                <a:spcPct val="140000"/>
+            <a:ext cx="4801859" cy="1646999"/>
+          </a:xfrm>
+          <a:prstGeom prst="rect">
+            <a:avLst/>
+          </a:prstGeom>
+          <a:noFill/>
+        </p:spPr>
+        <p:txBody>
+          <a:bodyPr wrap="square" anchor="t" lIns="0" rIns="0" tIns="0" bIns="0">
+            <a:spAutoFit/>
+          </a:bodyPr>
+          <a:lstStyle/>
+          <a:p>
+            <a:pPr algn="l">
+              <a:lnSpc>
+                <a:spcPct val="134000"/>
               </a:lnSpc>
               <a:spcAft>
                 <a:spcPts val="300"/>
@@ -24517,7 +24517,7 @@
           <a:p>
             <a:pPr algn="l">
               <a:lnSpc>
-                <a:spcPct val="140000"/>
+                <a:spcPct val="134000"/>
               </a:lnSpc>
               <a:spcAft>
                 <a:spcPts val="300"/>
@@ -24536,7 +24536,7 @@
           <a:p>
             <a:pPr algn="l">
               <a:lnSpc>
-                <a:spcPct val="140000"/>
+                <a:spcPct val="134000"/>
               </a:lnSpc>
               <a:spcAft>
                 <a:spcPts val="300"/>
@@ -24555,7 +24555,7 @@
           <a:p>
             <a:pPr algn="l">
               <a:lnSpc>
-                <a:spcPct val="140000"/>
+                <a:spcPct val="134000"/>
               </a:lnSpc>
               <a:spcAft>
                 <a:spcPts val="300"/>
@@ -24711,22 +24711,22 @@
         <p:spPr>
           <a:xfrm>
             <a:off x="7401059" y="3986999"/>
-            <a:ext cx="3793859" cy="540000"/>
-          </a:xfrm>
-          <a:prstGeom prst="rect">
-            <a:avLst/>
-          </a:prstGeom>
-          <a:noFill/>
-        </p:spPr>
-        <p:txBody>
-          <a:bodyPr wrap="square" anchor="t" lIns="0" rIns="0" tIns="0" bIns="0">
-            <a:spAutoFit/>
-          </a:bodyPr>
-          <a:lstStyle/>
-          <a:p>
-            <a:pPr algn="l">
-              <a:lnSpc>
-                <a:spcPct val="130000"/>
+            <a:ext cx="3793859" cy="595679"/>
+          </a:xfrm>
+          <a:prstGeom prst="rect">
+            <a:avLst/>
+          </a:prstGeom>
+          <a:noFill/>
+        </p:spPr>
+        <p:txBody>
+          <a:bodyPr wrap="square" anchor="t" lIns="0" rIns="0" tIns="0" bIns="0">
+            <a:spAutoFit/>
+          </a:bodyPr>
+          <a:lstStyle/>
+          <a:p>
+            <a:pPr algn="l">
+              <a:lnSpc>
+                <a:spcPct val="128000"/>
               </a:lnSpc>
             </a:pPr>
             <a:r>
@@ -24750,22 +24750,22 @@
         <p:spPr>
           <a:xfrm>
             <a:off x="6393059" y="4599000"/>
-            <a:ext cx="4801859" cy="1629000"/>
-          </a:xfrm>
-          <a:prstGeom prst="rect">
-            <a:avLst/>
-          </a:prstGeom>
-          <a:noFill/>
-        </p:spPr>
-        <p:txBody>
-          <a:bodyPr wrap="square" anchor="t" lIns="0" rIns="0" tIns="0" bIns="0">
-            <a:spAutoFit/>
-          </a:bodyPr>
-          <a:lstStyle/>
-          <a:p>
-            <a:pPr algn="l">
-              <a:lnSpc>
-                <a:spcPct val="140000"/>
+            <a:ext cx="4801859" cy="1646999"/>
+          </a:xfrm>
+          <a:prstGeom prst="rect">
+            <a:avLst/>
+          </a:prstGeom>
+          <a:noFill/>
+        </p:spPr>
+        <p:txBody>
+          <a:bodyPr wrap="square" anchor="t" lIns="0" rIns="0" tIns="0" bIns="0">
+            <a:spAutoFit/>
+          </a:bodyPr>
+          <a:lstStyle/>
+          <a:p>
+            <a:pPr algn="l">
+              <a:lnSpc>
+                <a:spcPct val="134000"/>
               </a:lnSpc>
               <a:spcAft>
                 <a:spcPts val="300"/>
@@ -24784,7 +24784,7 @@
           <a:p>
             <a:pPr algn="l">
               <a:lnSpc>
-                <a:spcPct val="140000"/>
+                <a:spcPct val="134000"/>
               </a:lnSpc>
               <a:spcAft>
                 <a:spcPts val="300"/>
@@ -24803,7 +24803,7 @@
           <a:p>
             <a:pPr algn="l">
               <a:lnSpc>
-                <a:spcPct val="140000"/>
+                <a:spcPct val="134000"/>
               </a:lnSpc>
               <a:spcAft>
                 <a:spcPts val="300"/>
@@ -24822,7 +24822,7 @@
           <a:p>
             <a:pPr algn="l">
               <a:lnSpc>
-                <a:spcPct val="140000"/>
+                <a:spcPct val="134000"/>
               </a:lnSpc>
               <a:spcAft>
                 <a:spcPts val="300"/>
@@ -26642,7 +26642,7 @@
           <a:p>
             <a:pPr algn="l">
               <a:lnSpc>
-                <a:spcPct val="135000"/>
+                <a:spcPct val="130000"/>
               </a:lnSpc>
             </a:pPr>
             <a:r>
@@ -26810,7 +26810,7 @@
               </a:lnSpc>
             </a:pPr>
             <a:r>
-              <a:rPr sz="1150" b="1" i="0">
+              <a:rPr sz="1100" b="1" i="0">
                 <a:solidFill>
                   <a:srgbClr val="1E4FA8"/>
                 </a:solidFill>
@@ -26845,7 +26845,7 @@
           <a:p>
             <a:pPr algn="l">
               <a:lnSpc>
-                <a:spcPct val="130000"/>
+                <a:spcPct val="125000"/>
               </a:lnSpc>
             </a:pPr>
             <a:r>
@@ -27136,7 +27136,7 @@
         <p:spPr>
           <a:xfrm>
             <a:off x="2379600" y="1105200"/>
-            <a:ext cx="5040000" cy="503999"/>
+            <a:ext cx="5040000" cy="612000"/>
           </a:xfrm>
           <a:prstGeom prst="rect">
             <a:avLst/>
@@ -27214,7 +27214,7 @@
         <p:spPr>
           <a:xfrm>
             <a:off x="799200" y="2736000"/>
-            <a:ext cx="8640000" cy="1620000"/>
+            <a:ext cx="8640000" cy="1172698"/>
           </a:xfrm>
           <a:prstGeom prst="rect">
             <a:avLst/>
@@ -29433,7 +29433,7 @@
                     <a:lstStyle/>
                     <a:p>
                       <a:r>
-                        <a:rPr sz="1100">
+                        <a:rPr sz="1100" b="0">
                           <a:solidFill>
                             <a:srgbClr val="1F2937"/>
                           </a:solidFill>
@@ -29455,7 +29455,7 @@
                     <a:lstStyle/>
                     <a:p>
                       <a:r>
-                        <a:rPr sz="1100">
+                        <a:rPr sz="1100" b="0">
                           <a:solidFill>
                             <a:srgbClr val="1F2937"/>
                           </a:solidFill>
@@ -29477,7 +29477,7 @@
                     <a:lstStyle/>
                     <a:p>
                       <a:r>
-                        <a:rPr sz="1100">
+                        <a:rPr sz="1100" b="0">
                           <a:solidFill>
                             <a:srgbClr val="1F2937"/>
                           </a:solidFill>
@@ -29499,7 +29499,7 @@
                     <a:lstStyle/>
                     <a:p>
                       <a:r>
-                        <a:rPr sz="1100">
+                        <a:rPr sz="1100" b="0">
                           <a:solidFill>
                             <a:srgbClr val="1F2937"/>
                           </a:solidFill>
@@ -29523,7 +29523,7 @@
                     <a:lstStyle/>
                     <a:p>
                       <a:r>
-                        <a:rPr sz="1100">
+                        <a:rPr sz="1100" b="0">
                           <a:solidFill>
                             <a:srgbClr val="1F2937"/>
                           </a:solidFill>
@@ -29545,7 +29545,7 @@
                     <a:lstStyle/>
                     <a:p>
                       <a:r>
-                        <a:rPr sz="1100">
+                        <a:rPr sz="1100" b="0">
                           <a:solidFill>
                             <a:srgbClr val="1F2937"/>
                           </a:solidFill>
@@ -29567,7 +29567,7 @@
                     <a:lstStyle/>
                     <a:p>
                       <a:r>
-                        <a:rPr sz="1100">
+                        <a:rPr sz="1100" b="0">
                           <a:solidFill>
                             <a:srgbClr val="1F2937"/>
                           </a:solidFill>
@@ -29589,7 +29589,7 @@
                     <a:lstStyle/>
                     <a:p>
                       <a:r>
-                        <a:rPr sz="1100">
+                        <a:rPr sz="1100" b="0">
                           <a:solidFill>
                             <a:srgbClr val="1F2937"/>
                           </a:solidFill>
@@ -29613,7 +29613,7 @@
                     <a:lstStyle/>
                     <a:p>
                       <a:r>
-                        <a:rPr sz="1100">
+                        <a:rPr sz="1100" b="0">
                           <a:solidFill>
                             <a:srgbClr val="1F2937"/>
                           </a:solidFill>
@@ -29635,7 +29635,7 @@
                     <a:lstStyle/>
                     <a:p>
                       <a:r>
-                        <a:rPr sz="1100">
+                        <a:rPr sz="1100" b="0">
                           <a:solidFill>
                             <a:srgbClr val="1F2937"/>
                           </a:solidFill>
@@ -29657,7 +29657,7 @@
                     <a:lstStyle/>
                     <a:p>
                       <a:r>
-                        <a:rPr sz="1100">
+                        <a:rPr sz="1100" b="0">
                           <a:solidFill>
                             <a:srgbClr val="1F2937"/>
                           </a:solidFill>
@@ -29679,7 +29679,7 @@
                     <a:lstStyle/>
                     <a:p>
                       <a:r>
-                        <a:rPr sz="1100">
+                        <a:rPr sz="1100" b="0">
                           <a:solidFill>
                             <a:srgbClr val="1F2937"/>
                           </a:solidFill>
@@ -29703,7 +29703,7 @@
                     <a:lstStyle/>
                     <a:p>
                       <a:r>
-                        <a:rPr sz="1100">
+                        <a:rPr sz="1100" b="0">
                           <a:solidFill>
                             <a:srgbClr val="1F2937"/>
                           </a:solidFill>
@@ -29725,7 +29725,7 @@
                     <a:lstStyle/>
                     <a:p>
                       <a:r>
-                        <a:rPr sz="1100">
+                        <a:rPr sz="1100" b="0">
                           <a:solidFill>
                             <a:srgbClr val="1F2937"/>
                           </a:solidFill>
@@ -29747,7 +29747,7 @@
                     <a:lstStyle/>
                     <a:p>
                       <a:r>
-                        <a:rPr sz="1100">
+                        <a:rPr sz="1100" b="0">
                           <a:solidFill>
                             <a:srgbClr val="1F2937"/>
                           </a:solidFill>
@@ -29769,7 +29769,7 @@
                     <a:lstStyle/>
                     <a:p>
                       <a:r>
-                        <a:rPr sz="1100">
+                        <a:rPr sz="1100" b="0">
                           <a:solidFill>
                             <a:srgbClr val="1F2937"/>
                           </a:solidFill>
@@ -29799,7 +29799,7 @@
         <p:spPr>
           <a:xfrm>
             <a:off x="799200" y="3366000"/>
-            <a:ext cx="10593719" cy="432000"/>
+            <a:ext cx="10593719" cy="503999"/>
           </a:xfrm>
           <a:prstGeom prst="rect">
             <a:avLst/>
@@ -30310,7 +30310,7 @@
         <p:spPr>
           <a:xfrm>
             <a:off x="997200" y="1584000"/>
-            <a:ext cx="4789259" cy="3528000"/>
+            <a:ext cx="4789259" cy="3582000"/>
           </a:xfrm>
           <a:prstGeom prst="rect">
             <a:avLst/>
@@ -30716,7 +30716,7 @@
         <p:spPr>
           <a:xfrm>
             <a:off x="6405659" y="1584000"/>
-            <a:ext cx="4789259" cy="3528000"/>
+            <a:ext cx="4789259" cy="3582000"/>
           </a:xfrm>
           <a:prstGeom prst="rect">
             <a:avLst/>
@@ -31508,7 +31508,7 @@
         <p:spPr>
           <a:xfrm>
             <a:off x="1015200" y="1890000"/>
-            <a:ext cx="2895240" cy="3240000"/>
+            <a:ext cx="2895240" cy="3276000"/>
           </a:xfrm>
           <a:prstGeom prst="rect">
             <a:avLst/>
@@ -31736,7 +31736,7 @@
         <p:spPr>
           <a:xfrm>
             <a:off x="4648440" y="1890000"/>
-            <a:ext cx="2895240" cy="3240000"/>
+            <a:ext cx="2895240" cy="3276000"/>
           </a:xfrm>
           <a:prstGeom prst="rect">
             <a:avLst/>
@@ -31964,7 +31964,7 @@
         <p:spPr>
           <a:xfrm>
             <a:off x="8281679" y="1890000"/>
-            <a:ext cx="2895240" cy="3240000"/>
+            <a:ext cx="2895240" cy="3276000"/>
           </a:xfrm>
           <a:prstGeom prst="rect">
             <a:avLst/>
@@ -32330,7 +32330,7 @@
         <p:spPr>
           <a:xfrm>
             <a:off x="2379600" y="1105200"/>
-            <a:ext cx="5040000" cy="503999"/>
+            <a:ext cx="5040000" cy="612000"/>
           </a:xfrm>
           <a:prstGeom prst="rect">
             <a:avLst/>
@@ -32408,7 +32408,7 @@
         <p:spPr>
           <a:xfrm>
             <a:off x="799200" y="2736000"/>
-            <a:ext cx="8640000" cy="1620000"/>
+            <a:ext cx="8640000" cy="829798"/>
           </a:xfrm>
           <a:prstGeom prst="rect">
             <a:avLst/>
